--- a/assets/pptx/catalog-657.pptx
+++ b/assets/pptx/catalog-657.pptx
@@ -3302,7 +3302,7 @@
                 <a:ea typeface="Ebrima"/>
                 <a:cs typeface="Ebrima"/>
               </a:rPr>
-              <a:t>እቆማለሁ ፀንቼ (2x)</a:t>
+              <a:t>እቆማለሁ ፀንቼ 2x</a:t>
             </a:r>
           </a:p>
         </p:txBody>
@@ -3387,7 +3387,7 @@
                 <a:ea typeface="Ebrima"/>
                 <a:cs typeface="Ebrima"/>
               </a:rPr>
-              <a:t>በዘመኔ ሁሉ ለእርሱ እገዛለሁ (2x)</a:t>
+              <a:t>በዘመኔ ሁሉ ለእርሱ እገዛለሁ 2x</a:t>
             </a:r>
           </a:p>
         </p:txBody>
@@ -3508,7 +3508,7 @@
                 <a:ea typeface="Ebrima"/>
                 <a:cs typeface="Ebrima"/>
               </a:rPr>
-              <a:t>ጌታዬን አመልከዋለሁ (2x)</a:t>
+              <a:t>ጌታዬን አመልከዋለሁ 2x</a:t>
             </a:r>
           </a:p>
         </p:txBody>
@@ -3593,7 +3593,7 @@
                 <a:ea typeface="Ebrima"/>
                 <a:cs typeface="Ebrima"/>
               </a:rPr>
-              <a:t>በዘመኔ ሁሉ ለእርሱ እገዛለሁ (2x)</a:t>
+              <a:t>በዘመኔ ሁሉ ለእርሱ እገዛለሁ 2x</a:t>
             </a:r>
           </a:p>
         </p:txBody>
@@ -3714,7 +3714,7 @@
                 <a:ea typeface="Ebrima"/>
                 <a:cs typeface="Ebrima"/>
               </a:rPr>
-              <a:t>አምላኬን አመልከዋለሁ (2x)</a:t>
+              <a:t>አምላኬን አመልከዋለሁ 2x</a:t>
             </a:r>
           </a:p>
         </p:txBody>
@@ -3799,7 +3799,7 @@
                 <a:ea typeface="Ebrima"/>
                 <a:cs typeface="Ebrima"/>
               </a:rPr>
-              <a:t>በዘመኔ ሁሉ ለእርሱ እገዛለሁ (2x)</a:t>
+              <a:t>በዘመኔ ሁሉ ለእርሱ እገዛለሁ 2x</a:t>
             </a:r>
           </a:p>
         </p:txBody>
@@ -4005,7 +4005,7 @@
                 <a:ea typeface="Ebrima"/>
                 <a:cs typeface="Ebrima"/>
               </a:rPr>
-              <a:t>በዘመኔ ሁሉ ለእርሱ እገዛለሁ (4x)</a:t>
+              <a:t>በዘመኔ ሁሉ ለእርሱ እገዛለሁ 4x</a:t>
             </a:r>
           </a:p>
         </p:txBody>
